--- a/WAT4/kalt/PRESENTATION.pptx
+++ b/WAT4/kalt/PRESENTATION.pptx
@@ -2470,7 +2470,7 @@
                   <a:srgbClr val="14342B"/>
                 </a:solidFill>
               </a:rPr>
-              <a:t>– Ladeplan-Button öffnet Modal</a:t>
+              <a:t>– Connected: Ladeplan-Button erscheint</a:t>
             </a:r>
             <a:endParaRPr lang="en-US" sz="1050" dirty="0"/>
           </a:p>
@@ -2506,7 +2506,7 @@
                   <a:srgbClr val="14342B"/>
                 </a:solidFill>
               </a:rPr>
-              <a:t>– Modal zeigt Zeit- und Energiefeld</a:t>
+              <a:t>– Modal: Zeit- und Energiefeld sichtbar</a:t>
             </a:r>
             <a:endParaRPr lang="en-US" sz="1050" dirty="0"/>
           </a:p>
@@ -2542,7 +2542,7 @@
                   <a:srgbClr val="2C7A4B"/>
                 </a:solidFill>
               </a:rPr>
-              <a:t>Vollständiger Smart-Charging-Workflow im echten Browser</a:t>
+              <a:t>Simulator-gestützt: realer connected-Status, vollständiger Modal-Workflow</a:t>
             </a:r>
             <a:endParaRPr lang="en-US" sz="1000" dirty="0"/>
           </a:p>
@@ -2648,7 +2648,7 @@
                   <a:srgbClr val="14342B"/>
                 </a:solidFill>
               </a:rPr>
-              <a:t>– Seitentitel sichtbar mit Live-Leistung (1.0 kW)</a:t>
+              <a:t>– Loadpoint mit Visualisierungs-Widget</a:t>
             </a:r>
             <a:endParaRPr lang="en-US" sz="1050" dirty="0"/>
           </a:p>
@@ -2684,7 +2684,7 @@
                   <a:srgbClr val="14342B"/>
                 </a:solidFill>
               </a:rPr>
-              <a:t>– Genau ein Ladepunkt 'Carport' angezeigt</a:t>
+              <a:t>– connected→charging: Status + Fortschrittsbalken</a:t>
             </a:r>
             <a:endParaRPr lang="en-US" sz="1050" dirty="0"/>
           </a:p>
@@ -2720,7 +2720,7 @@
                   <a:srgbClr val="2C7A4B"/>
                 </a:solidFill>
               </a:rPr>
-              <a:t>WebSocket-Daten kommen korrekt im Widget an</a:t>
+              <a:t>Simulator-gestützt: echter connected→charging Statusübergang im UI</a:t>
             </a:r>
             <a:endParaRPr lang="en-US" sz="1000" dirty="0"/>
           </a:p>
@@ -3357,7 +3357,7 @@
                   <a:srgbClr val="14342B"/>
                 </a:solidFill>
               </a:rPr>
-              <a:t>Test 1: Ladeplan-Button öffnet Modal</a:t>
+              <a:t>Test 1: Fahrzeug connected → Ladeplan-Button erscheint</a:t>
             </a:r>
             <a:endParaRPr lang="en-US" sz="1200" dirty="0"/>
           </a:p>
@@ -3393,7 +3393,7 @@
                   <a:srgbClr val="14342B"/>
                 </a:solidFill>
               </a:rPr>
-              <a:t>Klick auf Ladeplan-Button → Charging-Plan-Modal erscheint.</a:t>
+              <a:t>Simulator setzt Ladepunkt auf B (connected) → Ladeplan-Button sichtbar.</a:t>
             </a:r>
             <a:endParaRPr lang="en-US" sz="1100" dirty="0"/>
           </a:p>
@@ -3407,7 +3407,7 @@
                   <a:srgbClr val="14342B"/>
                 </a:solidFill>
               </a:rPr>
-              <a:t>Bestätigt: der Einstiegspunkt in die Ladeplanung funktioniert.</a:t>
+              <a:t>Bestätigt: Button erscheint nur wenn Fahrzeug angesteckt ist.</a:t>
             </a:r>
             <a:endParaRPr lang="en-US" sz="1100" dirty="0"/>
           </a:p>
@@ -3477,7 +3477,7 @@
                   <a:srgbClr val="14342B"/>
                 </a:solidFill>
               </a:rPr>
-              <a:t>Test 2: Zeit- und Energiefeld vorhanden</a:t>
+              <a:t>Test 2: Modal öffnet mit Zeit- und Energiefeld</a:t>
             </a:r>
             <a:endParaRPr lang="en-US" sz="1200" dirty="0"/>
           </a:p>
@@ -3513,7 +3513,7 @@
                   <a:srgbClr val="14342B"/>
                 </a:solidFill>
               </a:rPr>
-              <a:t>Im geöffneten Modal sind static-plan-time und static-plan-energy sichtbar.</a:t>
+              <a:t>Modal enthält static-plan-time und static-plan-energy.</a:t>
             </a:r>
             <a:endParaRPr lang="en-US" sz="1100" dirty="0"/>
           </a:p>
@@ -3527,7 +3527,16 @@
                   <a:srgbClr val="14342B"/>
                 </a:solidFill>
               </a:rPr>
-              <a:t>Bestätigt: der Nutzer kann tatsächlich planen (Zeit und Energiemenge).</a:t>
+              <a:t>Bestätigt: Nutzer kann Ladeplan konfigurieren.</a:t>
+            </a:r>
+            <a:endParaRPr lang="en-US" sz="1100" dirty="0"/>
+          </a:p>
+          <a:p>
+            <a:pPr marL="0" indent="0">
+              <a:buNone/>
+            </a:pPr>
+            <a:r>
+              <a:t>Bestätigt: vollständiger Ladeplan-Workflow nutzbar.</a:t>
             </a:r>
             <a:endParaRPr lang="en-US" sz="1100" dirty="0"/>
           </a:p>
@@ -3667,7 +3676,7 @@
                   <a:srgbClr val="14342B"/>
                 </a:solidFill>
               </a:rPr>
-              <a:t>Test 1: Seitentitel mit Live-Leistung</a:t>
+              <a:t>Test 1: Loadpoint mit Visualisierungs-Widget</a:t>
             </a:r>
             <a:endParaRPr lang="en-US" sz="1200" dirty="0"/>
           </a:p>
@@ -3703,7 +3712,7 @@
                   <a:srgbClr val="14342B"/>
                 </a:solidFill>
               </a:rPr>
-              <a:t>Seite zeigt Titel der Anlage und eine Live-Leistung von 1.0 kW.</a:t>
+              <a:t>Simulator-Setup: Loadpoint sichtbar, Visualisierungs-Widget vorhanden.</a:t>
             </a:r>
             <a:endParaRPr lang="en-US" sz="1100" dirty="0"/>
           </a:p>
@@ -3717,7 +3726,7 @@
                   <a:srgbClr val="14342B"/>
                 </a:solidFill>
               </a:rPr>
-              <a:t>Bestätigt: WebSocket-Verbindung überträgt Echtzeit-Daten korrekt.</a:t>
+              <a:t>Simulator auf B (connected) → vehicle-status-charger zeigt „Connected“.</a:t>
             </a:r>
             <a:endParaRPr lang="en-US" sz="1100" dirty="0"/>
           </a:p>
@@ -3787,7 +3796,7 @@
                   <a:srgbClr val="14342B"/>
                 </a:solidFill>
               </a:rPr>
-              <a:t>Test 2: Genau ein Ladepunkt sichtbar</a:t>
+              <a:t>Test 3: Statusübergang connected → charging im UI</a:t>
             </a:r>
             <a:endParaRPr lang="en-US" sz="1200" dirty="0"/>
           </a:p>
@@ -3823,7 +3832,7 @@
                   <a:srgbClr val="14342B"/>
                 </a:solidFill>
               </a:rPr>
-              <a:t>Exakt ein Ladepunkt 'Carport' in der Hauptansicht.</a:t>
+              <a:t>Schnell-Modus aktivieren, Simulator auf C (charging) → Status „Charging“ + animierter Fortschrittsbalken.</a:t>
             </a:r>
             <a:endParaRPr lang="en-US" sz="1100" dirty="0"/>
           </a:p>
@@ -3837,7 +3846,7 @@
                   <a:srgbClr val="14342B"/>
                 </a:solidFill>
               </a:rPr>
-              <a:t>Bestätigt: Konfiguration aus Fixture kommt korrekt im UI an.</a:t>
+              <a:t>Bestätigt: vollständiger Ladevorgang-Workflow im echten Browser.</a:t>
             </a:r>
             <a:endParaRPr lang="en-US" sz="1100" dirty="0"/>
           </a:p>
@@ -4597,7 +4606,7 @@
                   <a:srgbClr val="14342B"/>
                 </a:solidFill>
               </a:rPr>
-              <a:t>p95-Antwortzeit &lt; 500 ms   |   Fehlerrate &lt; 1 %</a:t>
+              <a:t>HTTP p95 &lt; 200 ms  |  WS-Verbindung p95 &lt; 500 ms  |  Fehlerrate &lt; 5 %</a:t>
             </a:r>
             <a:endParaRPr lang="en-US" sz="1200" dirty="0"/>
           </a:p>
@@ -4775,7 +4784,7 @@
                   <a:srgbClr val="14342B"/>
                 </a:solidFill>
               </a:rPr>
-              <a:t>GET /api/sessions (SQLite-Read)</a:t>
+              <a:t>GET /api/state + /api/tariff/grid + WebSocket /ws</a:t>
             </a:r>
             <a:endParaRPr lang="en-US" sz="1100" dirty="0"/>
           </a:p>
@@ -4847,7 +4856,7 @@
                   <a:srgbClr val="14342B"/>
                 </a:solidFill>
               </a:rPr>
-              <a:t>15s Rampe → 20 VU → 30s halten → 10s runter</a:t>
+              <a:t>15s → 5 VU, 30s → 10 VU, 20s → 20 VU, 10s → 0</a:t>
             </a:r>
             <a:endParaRPr lang="en-US" sz="1100" dirty="0"/>
           </a:p>
@@ -4883,7 +4892,7 @@
                   <a:srgbClr val="14342B"/>
                 </a:solidFill>
               </a:rPr>
-              <a:t>Ergebnis:</a:t>
+              <a:t>Warum:</a:t>
             </a:r>
             <a:endParaRPr lang="en-US" sz="1100" dirty="0"/>
           </a:p>
@@ -4919,7 +4928,7 @@
                   <a:srgbClr val="6FA361"/>
                 </a:solidFill>
               </a:rPr>
-              <a:t>p95 = 107 ms</a:t>
+              <a:t>Tarif-Abruf + WebSocket unter gleichzeitiger Last</a:t>
             </a:r>
             <a:endParaRPr lang="en-US" sz="1300" dirty="0"/>
           </a:p>
@@ -4955,7 +4964,16 @@
                   <a:srgbClr val="14342B"/>
                 </a:solidFill>
               </a:rPr>
-              <a:t>SQLite-gestützter Read zeigt ein anderes Lastverhalten als In-Memory-State. Vor diesen Tests gab es keinen einzigen Lasttest im Projekt.</a:t>
+              <a:t>Fehler hier = alle Nutzer gleichzeitig falsche Ladeentscheidungen.</a:t>
+            </a:r>
+            <a:endParaRPr lang="en-US" sz="1150" dirty="0"/>
+          </a:p>
+          <a:p>
+            <a:pPr marL="0" indent="0">
+              <a:buNone/>
+            </a:pPr>
+            <a:r>
+              <a:t>Tarif-Daten und State-Updates müssen auch unter Peak-Last zuverlässig ausgeliefert werden.</a:t>
             </a:r>
             <a:endParaRPr lang="en-US" sz="1150" dirty="0"/>
           </a:p>
@@ -5462,7 +5480,7 @@
                   <a:srgbClr val="14342B"/>
                 </a:solidFill>
               </a:rPr>
-              <a:t>sessions-load.js  –  GET /api/sessions</a:t>
+              <a:t>sessions-load.js  –  Tarif, State &amp; WebSocket unter Last</a:t>
             </a:r>
             <a:endParaRPr lang="en-US" sz="1600" dirty="0"/>
           </a:p>
@@ -5498,7 +5516,7 @@
                   <a:srgbClr val="14342B"/>
                 </a:solidFill>
               </a:rPr>
-              <a:t>Der Endpoint liefert alle gespeicherten Ladesessions aus SQLite. Im Gegensatz zum reinen In-Memory-State-Endpoint ist hier eine Datenbankabfrage beteiligt, was ein anderes Lastprofil erzeugt.</a:t>
+              <a:t>Kalteneggers Lasttest deckt REST + WebSocket ab. Fachlicher Fokus: Tarif-Abruf (/api/tariff/grid) und System-Status (/api/state) unter Last – ein Ausfall lässt alle Nutzer gleichzeitig falsche Ladeentscheidungen treffen. Jede Session hält zusätzlich eine WebSocket-Verbindung für Live-Updates offen.</a:t>
             </a:r>
             <a:endParaRPr lang="en-US" sz="1250" dirty="0"/>
           </a:p>
@@ -5604,7 +5622,7 @@
                   <a:srgbClr val="14342B"/>
                 </a:solidFill>
               </a:rPr>
-              <a:t>Phase 1 (0–15 s): Ramp-up auf 20 virtuelle Nutzer</a:t>
+              <a:t>Phase 1 (0–15 s): Ramp-up auf 5 VU</a:t>
             </a:r>
             <a:endParaRPr lang="en-US" sz="1200" dirty="0"/>
           </a:p>
@@ -5640,7 +5658,7 @@
                   <a:srgbClr val="14342B"/>
                 </a:solidFill>
               </a:rPr>
-              <a:t>Phase 2 (15–45 s): Stabile Last: 20 VU parallel</a:t>
+              <a:t>Phase 2 (15–45 s): Stabile Last: 10 VU</a:t>
             </a:r>
             <a:endParaRPr lang="en-US" sz="1200" dirty="0"/>
           </a:p>
@@ -5676,7 +5694,7 @@
                   <a:srgbClr val="14342B"/>
                 </a:solidFill>
               </a:rPr>
-              <a:t>Phase 3 (45–55 s): Ramp-down auf 0</a:t>
+              <a:t>Phase 3 (45–65 s): Spitze 20 VU  |  Phase 4 (65–75 s): Ramp-down</a:t>
             </a:r>
             <a:endParaRPr lang="en-US" sz="1200" dirty="0"/>
           </a:p>
@@ -5782,7 +5800,7 @@
                   <a:srgbClr val="14342B"/>
                 </a:solidFill>
               </a:rPr>
-              <a:t>p95 &lt; 500 ms</a:t>
+              <a:t>HTTP p95 &lt; 200 ms  /  WS-Verbindung p95 &lt; 500 ms</a:t>
             </a:r>
             <a:endParaRPr lang="en-US" sz="1300" dirty="0"/>
           </a:p>
@@ -5818,7 +5836,7 @@
                   <a:srgbClr val="6FA361"/>
                 </a:solidFill>
               </a:rPr>
-              <a:t>→  gemessener Wert: 107 ms</a:t>
+              <a:t/>
             </a:r>
             <a:endParaRPr lang="en-US" sz="1300" dirty="0"/>
           </a:p>
@@ -5854,7 +5872,7 @@
                   <a:srgbClr val="14342B"/>
                 </a:solidFill>
               </a:rPr>
-              <a:t>Fehlerrate &lt; 1 %</a:t>
+              <a:t>API-Fehlerrate + WS-Fehlerrate je &lt; 5 %</a:t>
             </a:r>
             <a:endParaRPr lang="en-US" sz="1300" dirty="0"/>
           </a:p>
@@ -5890,7 +5908,7 @@
                   <a:srgbClr val="6FA361"/>
                 </a:solidFill>
               </a:rPr>
-              <a:t>→  gemessener Wert: 0 %</a:t>
+              <a:t/>
             </a:r>
             <a:endParaRPr lang="en-US" sz="1300" dirty="0"/>
           </a:p>
@@ -5960,7 +5978,7 @@
                   <a:srgbClr val="2C7A4B"/>
                 </a:solidFill>
               </a:rPr>
-              <a:t>Warum /api/sessions und nicht ein anderer Endpoint?</a:t>
+              <a:t>Warum Tarif + WebSocket?</a:t>
             </a:r>
             <a:endParaRPr lang="en-US" sz="1350" dirty="0"/>
           </a:p>
@@ -5996,7 +6014,7 @@
                   <a:srgbClr val="14342B"/>
                 </a:solidFill>
               </a:rPr>
-              <a:t>Mosers Lasttest deckt bereits /api/state + WebSocket ab. /api/sessions ergänzt das: dieser Endpoint liest aus SQLite, nicht aus In-Memory-State. DB-Reads skalieren anders als State-Reads – eine separate Messung ist sinnvoll. Kein vorheriger Lasttest im Projekt existierte.</a:t>
+              <a:t>Tarifdaten und State-Updates sind zeitkritisch: Bei dynamischen Tarifen entscheidet Millisekunden-Genauigkeit wann geladen wird. Der WebSocket überträgt alle Live-Daten – bricht er unter Last, friert das UI ein. Zweiter unabhängiger Messpunkt zu Mosers websocket-load.js.</a:t>
             </a:r>
             <a:endParaRPr lang="en-US" sz="1200" dirty="0"/>
           </a:p>
@@ -6555,7 +6573,7 @@
                   <a:srgbClr val="14342B"/>
                 </a:solidFill>
               </a:rPr>
-              <a:t>Kaltenegger testet /api/sessions (SQLite-Read, historische Daten).</a:t>
+              <a:t>Kaltenegger testet /api/state + /api/tariff/grid + WebSocket (zweiter unabhängiger Messpunkt).</a:t>
             </a:r>
             <a:endParaRPr lang="en-US" sz="1200" dirty="0"/>
           </a:p>
@@ -6563,6 +6581,9 @@
             <a:pPr marL="0" indent="0">
               <a:buNone/>
             </a:pPr>
+            <a:r>
+              <a:t> </a:t>
+            </a:r>
             <a:endParaRPr lang="en-US" sz="1200" dirty="0"/>
           </a:p>
           <a:p>
@@ -6575,7 +6596,7 @@
                   <a:srgbClr val="14342B"/>
                 </a:solidFill>
               </a:rPr>
-              <a:t>Moser testet /api/state + WebSocket (In-Memory-State, Live-Daten).</a:t>
+              <a:t>Moser testet /api/state + WebSocket (primärer WebSocket-Messpunkt).</a:t>
             </a:r>
             <a:endParaRPr lang="en-US" sz="1200" dirty="0"/>
           </a:p>
@@ -6583,6 +6604,9 @@
             <a:pPr marL="0" indent="0">
               <a:buNone/>
             </a:pPr>
+            <a:r>
+              <a:t>Beide messen WebSocket-Stabilität aus unterschiedlichen Last-Szenarien und ergänzen sich.</a:t>
+            </a:r>
             <a:endParaRPr lang="en-US" sz="1200" dirty="0"/>
           </a:p>
           <a:p>
@@ -6595,7 +6619,7 @@
                   <a:srgbClr val="14342B"/>
                 </a:solidFill>
               </a:rPr>
-              <a:t>Beide Szenarien ergänzen sich und decken unterschiedliche Last-Charakteristiken ab.</a:t>
+              <a:t/>
             </a:r>
             <a:endParaRPr lang="en-US" sz="1200" dirty="0"/>
           </a:p>
@@ -7425,7 +7449,7 @@
                   <a:srgbClr val="587067"/>
                 </a:solidFill>
               </a:rPr>
-              <a:t>Unit-Tests (M)</a:t>
+              <a:t>Unit-Tests (K+M)</a:t>
             </a:r>
             <a:endParaRPr lang="en-US" sz="1100" dirty="0"/>
           </a:p>
@@ -8171,7 +8195,7 @@
                   <a:srgbClr val="14342B"/>
                 </a:solidFill>
               </a:rPr>
-              <a:t>Kaltenegger – 34 Fälle / 10 Dateien</a:t>
+              <a:t>Kaltenegger – 15 Fälle / 4 Dateien</a:t>
             </a:r>
             <a:endParaRPr lang="en-US" sz="1400" dirty="0"/>
           </a:p>
@@ -8207,7 +8231,7 @@
                   <a:srgbClr val="587067"/>
                 </a:solidFill>
               </a:rPr>
-              <a:t>Framework: Jest + ts-jest</a:t>
+              <a:t>Framework: Vitest</a:t>
             </a:r>
             <a:endParaRPr lang="en-US" sz="1100" dirty="0"/>
           </a:p>
@@ -8243,7 +8267,7 @@
                   <a:srgbClr val="14342B"/>
                 </a:solidFill>
               </a:rPr>
-              <a:t>– Tarif-Slot-Konvertierung (convertRates)</a:t>
+              <a:t>– forecast.test.ts: günstigstes Ladefenster, Solarprognose, statisch/dynamisch (5 Fälle)</a:t>
             </a:r>
             <a:endParaRPr lang="en-US" sz="1150" dirty="0"/>
           </a:p>
@@ -8279,7 +8303,7 @@
                   <a:srgbClr val="14342B"/>
                 </a:solidFill>
               </a:rPr>
-              <a:t>– PV-Prognose Kalibrierfaktor (forecastSolar)</a:t>
+              <a:t>– tariffSlots.test.ts: Preisspanne, aktiver Tarif, 15-min-Raster (5 Fälle)</a:t>
             </a:r>
             <a:endParaRPr lang="en-US" sz="1150" dirty="0"/>
           </a:p>
@@ -8315,7 +8339,7 @@
                   <a:srgbClr val="14342B"/>
                 </a:solidFill>
               </a:rPr>
-              <a:t>– Günstigstes Ladefenster (forecastLowestSlot)</a:t>
+              <a:t>– ocpp.test.ts: Wallbox-URL (externalUrl vs. Fallback + StationId) (3 Fälle)</a:t>
             </a:r>
             <a:endParaRPr lang="en-US" sz="1150" dirty="0"/>
           </a:p>
@@ -8351,7 +8375,7 @@
                   <a:srgbClr val="14342B"/>
                 </a:solidFill>
               </a:rPr>
-              <a:t>– Statisch vs. dynamisch (forecastStaticTariff)</a:t>
+              <a:t>– remote.test.ts: Online-Erkennung 5-min-Grenzwert (2 Fälle)</a:t>
             </a:r>
             <a:endParaRPr lang="en-US" sz="1150" dirty="0"/>
           </a:p>
@@ -8387,7 +8411,7 @@
                   <a:srgbClr val="14342B"/>
                 </a:solidFill>
               </a:rPr>
-              <a:t>– 15-min Raster (tariffGenerateSlots)</a:t>
+              <a:t/>
             </a:r>
             <a:endParaRPr lang="en-US" sz="1150" dirty="0"/>
           </a:p>
@@ -8423,7 +8447,7 @@
                   <a:srgbClr val="14342B"/>
                 </a:solidFill>
               </a:rPr>
-              <a:t>– Kostenbereich + akt. Tarif (tariffCostRange / FindRate)</a:t>
+              <a:t/>
             </a:r>
             <a:endParaRPr lang="en-US" sz="1150" dirty="0"/>
           </a:p>
@@ -8459,7 +8483,7 @@
                   <a:srgbClr val="14342B"/>
                 </a:solidFill>
               </a:rPr>
-              <a:t>– Wallbox-URL (ocpp)</a:t>
+              <a:t/>
             </a:r>
             <a:endParaRPr lang="en-US" sz="1150" dirty="0"/>
           </a:p>
@@ -8495,7 +8519,7 @@
                   <a:srgbClr val="14342B"/>
                 </a:solidFill>
               </a:rPr>
-              <a:t>– Online-Erkennung 5-min-Grenze (remote)</a:t>
+              <a:t/>
             </a:r>
             <a:endParaRPr lang="en-US" sz="1150" dirty="0"/>
           </a:p>
@@ -8531,7 +8555,7 @@
                   <a:srgbClr val="14342B"/>
                 </a:solidFill>
               </a:rPr>
-              <a:t>– Ladepunkt-Reihenfolge (uiLoadpoints-layout)</a:t>
+              <a:t/>
             </a:r>
             <a:endParaRPr lang="en-US" sz="1150" dirty="0"/>
           </a:p>
@@ -9019,7 +9043,7 @@
                   <a:srgbClr val="14342B"/>
                 </a:solidFill>
               </a:rPr>
-              <a:t>convertRates</a:t>
+              <a:t>forecast.test.ts – Solarprognose &amp; günstigstes Ladefenster</a:t>
             </a:r>
             <a:endParaRPr lang="en-US" sz="1250" dirty="0"/>
           </a:p>
@@ -9055,7 +9079,7 @@
                   <a:srgbClr val="587067"/>
                 </a:solidFill>
               </a:rPr>
-              <a:t>Jede Tarif-Anzeige baut darauf auf – ein Fehler verfälscht alle Preise</a:t>
+              <a:t>5 Fälle. findLowestSumSlotIndex (Breite 2, Breite 3), isStaticTariff (true wenn gleich, false wenn abweichend), adjustedSolar (skaliert today/tomorrow/dayAfterTomorrow).</a:t>
             </a:r>
             <a:endParaRPr lang="en-US" sz="1050" dirty="0"/>
           </a:p>
@@ -9125,7 +9149,7 @@
                   <a:srgbClr val="14342B"/>
                 </a:solidFill>
               </a:rPr>
-              <a:t>forecastSolar</a:t>
+              <a:t>tariffSlots.test.ts – Tarifsystem &amp; 15-min-Rasterung</a:t>
             </a:r>
             <a:endParaRPr lang="en-US" sz="1250" dirty="0"/>
           </a:p>
@@ -9161,7 +9185,7 @@
                   <a:srgbClr val="587067"/>
                 </a:solidFill>
               </a:rPr>
-              <a:t>Falscher Kalibrierfaktor verschiebt die gesamte PV-Prognose</a:t>
+              <a:t>5 Fälle. calculateCostRange (min/max, ignoriert undefined), findRateInRange (findet überlappenden Tarif), generateRateSlots (15 Minuten exakt, selectable spiegelt value).</a:t>
             </a:r>
             <a:endParaRPr lang="en-US" sz="1050" dirty="0"/>
           </a:p>
@@ -9231,7 +9255,7 @@
                   <a:srgbClr val="14342B"/>
                 </a:solidFill>
               </a:rPr>
-              <a:t>forecastLowestSlot</a:t>
+              <a:t>ocpp.test.ts – Wallbox-URL-Generierung</a:t>
             </a:r>
             <a:endParaRPr lang="en-US" sz="1250" dirty="0"/>
           </a:p>
@@ -9267,7 +9291,7 @@
                   <a:srgbClr val="587067"/>
                 </a:solidFill>
               </a:rPr>
-              <a:t>Off-by-one → falsches Ladefenster → Nutzer zahlt mehr Strom</a:t>
+              <a:t>3 Fälle. getOcppUrl: externalUrl hat Priorität vor Fallback (hostname + Port). getOcppUrlWithStationId: &lt;stationId&gt;-Platzhalter wird angehängt. Falsche URL = Wallbox unerreichbar.</a:t>
             </a:r>
             <a:endParaRPr lang="en-US" sz="1050" dirty="0"/>
           </a:p>
@@ -9337,7 +9361,7 @@
                   <a:srgbClr val="14342B"/>
                 </a:solidFill>
               </a:rPr>
-              <a:t>forecastStaticTariff</a:t>
+              <a:t>remote.test.ts – Remote-Client-Aktivitätserkennung</a:t>
             </a:r>
             <a:endParaRPr lang="en-US" sz="1250" dirty="0"/>
           </a:p>
@@ -9373,7 +9397,7 @@
                   <a:srgbClr val="587067"/>
                 </a:solidFill>
               </a:rPr>
-              <a:t>Falsch-positiv zeigt sinnlose Planung, falsch-negativ versteckt sie</a:t>
+              <a:t>2 Fälle. true bei 2 min (aktiv), false bei exakt 5 min (Grenzwert = abgelaufen).</a:t>
             </a:r>
             <a:endParaRPr lang="en-US" sz="1050" dirty="0"/>
           </a:p>
@@ -9409,6 +9433,9 @@
           <a:bodyPr/>
           <a:lstStyle/>
           <a:p>
+            <a:r>
+              <a:t/>
+            </a:r>
             <a:endParaRPr lang="de-AT"/>
           </a:p>
         </p:txBody>
@@ -9443,7 +9470,7 @@
                   <a:srgbClr val="14342B"/>
                 </a:solidFill>
               </a:rPr>
-              <a:t>tariffGenerateSlots</a:t>
+              <a:t/>
             </a:r>
             <a:endParaRPr lang="en-US" sz="1250" dirty="0"/>
           </a:p>
@@ -9479,7 +9506,7 @@
                   <a:srgbClr val="587067"/>
                 </a:solidFill>
               </a:rPr>
-              <a:t>15-min-Raster speist alle Tarif-Markierungen – falsch = alle Balken verschoben</a:t>
+              <a:t/>
             </a:r>
             <a:endParaRPr lang="en-US" sz="1050" dirty="0"/>
           </a:p>
@@ -9515,6 +9542,9 @@
           <a:bodyPr/>
           <a:lstStyle/>
           <a:p>
+            <a:r>
+              <a:t/>
+            </a:r>
             <a:endParaRPr lang="de-AT"/>
           </a:p>
         </p:txBody>
@@ -9549,7 +9579,7 @@
                   <a:srgbClr val="14342B"/>
                 </a:solidFill>
               </a:rPr>
-              <a:t>tariffCostRange</a:t>
+              <a:t/>
             </a:r>
             <a:endParaRPr lang="en-US" sz="1250" dirty="0"/>
           </a:p>
@@ -9585,7 +9615,7 @@
                   <a:srgbClr val="587067"/>
                 </a:solidFill>
               </a:rPr>
-              <a:t>Bildet die Preis-Skala der Forecast-Anzeige – Nullwerte dürfen sie nicht verzerren</a:t>
+              <a:t/>
             </a:r>
             <a:endParaRPr lang="en-US" sz="1050" dirty="0"/>
           </a:p>
@@ -9621,6 +9651,9 @@
           <a:bodyPr/>
           <a:lstStyle/>
           <a:p>
+            <a:r>
+              <a:t/>
+            </a:r>
             <a:endParaRPr lang="de-AT"/>
           </a:p>
         </p:txBody>
@@ -9655,7 +9688,7 @@
                   <a:srgbClr val="14342B"/>
                 </a:solidFill>
               </a:rPr>
-              <a:t>tariffFindRate</a:t>
+              <a:t/>
             </a:r>
             <a:endParaRPr lang="en-US" sz="1250" dirty="0"/>
           </a:p>
@@ -9691,7 +9724,7 @@
                   <a:srgbClr val="587067"/>
                 </a:solidFill>
               </a:rPr>
-              <a:t>Liefert den aktuell geltenden Tarif – Grundlage jeder Kostenanzeige</a:t>
+              <a:t/>
             </a:r>
             <a:endParaRPr lang="en-US" sz="1050" dirty="0"/>
           </a:p>
@@ -9727,6 +9760,9 @@
           <a:bodyPr/>
           <a:lstStyle/>
           <a:p>
+            <a:r>
+              <a:t/>
+            </a:r>
             <a:endParaRPr lang="de-AT"/>
           </a:p>
         </p:txBody>
@@ -9761,7 +9797,7 @@
                   <a:srgbClr val="14342B"/>
                 </a:solidFill>
               </a:rPr>
-              <a:t>ocpp</a:t>
+              <a:t/>
             </a:r>
             <a:endParaRPr lang="en-US" sz="1250" dirty="0"/>
           </a:p>
@@ -9797,7 +9833,7 @@
                   <a:srgbClr val="587067"/>
                 </a:solidFill>
               </a:rPr>
-              <a:t>Falsche URL macht die Wallbox unerreichbar / unkonfigurierbar</a:t>
+              <a:t/>
             </a:r>
             <a:endParaRPr lang="en-US" sz="1050" dirty="0"/>
           </a:p>
@@ -9833,6 +9869,9 @@
           <a:bodyPr/>
           <a:lstStyle/>
           <a:p>
+            <a:r>
+              <a:t/>
+            </a:r>
             <a:endParaRPr lang="de-AT"/>
           </a:p>
         </p:txBody>
@@ -9867,7 +9906,7 @@
                   <a:srgbClr val="14342B"/>
                 </a:solidFill>
               </a:rPr>
-              <a:t>remote</a:t>
+              <a:t/>
             </a:r>
             <a:endParaRPr lang="en-US" sz="1250" dirty="0"/>
           </a:p>
@@ -9903,7 +9942,7 @@
                   <a:srgbClr val="587067"/>
                 </a:solidFill>
               </a:rPr>
-              <a:t>5-min-Grenze steuert den Online-Status des Remote-Clients</a:t>
+              <a:t/>
             </a:r>
             <a:endParaRPr lang="en-US" sz="1050" dirty="0"/>
           </a:p>
@@ -9939,6 +9978,9 @@
           <a:bodyPr/>
           <a:lstStyle/>
           <a:p>
+            <a:r>
+              <a:t/>
+            </a:r>
             <a:endParaRPr lang="de-AT"/>
           </a:p>
         </p:txBody>
@@ -9973,7 +10015,7 @@
                   <a:srgbClr val="14342B"/>
                 </a:solidFill>
               </a:rPr>
-              <a:t>uiLoadpoints-layout</a:t>
+              <a:t/>
             </a:r>
             <a:endParaRPr lang="en-US" sz="1250" dirty="0"/>
           </a:p>
@@ -10009,7 +10051,7 @@
                   <a:srgbClr val="587067"/>
                 </a:solidFill>
               </a:rPr>
-              <a:t>Falsche Reihenfolge oder Ladepunkte unsichtbar trotz Konfiguration</a:t>
+              <a:t/>
             </a:r>
             <a:endParaRPr lang="en-US" sz="1050" dirty="0"/>
           </a:p>
@@ -10839,7 +10881,7 @@
                   <a:srgbClr val="14342B"/>
                 </a:solidFill>
               </a:rPr>
-              <a:t>Kaltenegger – 8 Fälle / 3 Komponenten</a:t>
+              <a:t>Kaltenegger – 12 Fälle / 3 Komponenten</a:t>
             </a:r>
             <a:endParaRPr lang="en-US" sz="1300" dirty="0"/>
           </a:p>
@@ -10945,7 +10987,7 @@
                   <a:srgbClr val="2C7A4B"/>
                 </a:solidFill>
               </a:rPr>
-              <a:t>3 Fälle</a:t>
+              <a:t>4 Fälle</a:t>
             </a:r>
             <a:endParaRPr lang="en-US" sz="1100" dirty="0"/>
           </a:p>
@@ -10981,7 +11023,7 @@
                   <a:srgbClr val="587067"/>
                 </a:solidFill>
               </a:rPr>
-              <a:t>Preisbalken, Ladefenster aktiv, teure Fenster</a:t>
+              <a:t>Preisbalken, aktiv/warning markiert, keine Duplikate</a:t>
             </a:r>
             <a:endParaRPr lang="en-US" sz="1100" dirty="0"/>
           </a:p>
@@ -11087,7 +11129,7 @@
                   <a:srgbClr val="2C7A4B"/>
                 </a:solidFill>
               </a:rPr>
-              <a:t>3 Fälle</a:t>
+              <a:t>4 Fälle</a:t>
             </a:r>
             <a:endParaRPr lang="en-US" sz="1100" dirty="0"/>
           </a:p>
@@ -11123,7 +11165,7 @@
                   <a:srgbClr val="587067"/>
                 </a:solidFill>
               </a:rPr>
-              <a:t>Grenzen (älteste / heute), Tageswahl lädt nach</a:t>
+              <a:t>Grenzen (alt/heute), Vor-Button aktiv, Vor-/Rück-Event</a:t>
             </a:r>
             <a:endParaRPr lang="en-US" sz="1100" dirty="0"/>
           </a:p>
@@ -11229,7 +11271,7 @@
                   <a:srgbClr val="2C7A4B"/>
                 </a:solidFill>
               </a:rPr>
-              <a:t>2 Fälle</a:t>
+              <a:t>4 Fälle</a:t>
             </a:r>
             <a:endParaRPr lang="en-US" sz="1100" dirty="0"/>
           </a:p>
@@ -11265,7 +11307,7 @@
                   <a:srgbClr val="587067"/>
                 </a:solidFill>
               </a:rPr>
-              <a:t>Leer-Hinweis vs. eine Zeile je Ladevorgang</a:t>
+              <a:t>Leer-Hinweis, Zeile je Session, Fahrzeug/Ladepunkt, Reihenfolge</a:t>
             </a:r>
             <a:endParaRPr lang="en-US" sz="1100" dirty="0"/>
           </a:p>
@@ -11946,7 +11988,7 @@
                   <a:srgbClr val="14342B"/>
                 </a:solidFill>
               </a:rPr>
-              <a:t>TariffChart.vue  –  3 Fälle</a:t>
+              <a:t>TariffChart.vue  –  4 Fälle</a:t>
             </a:r>
             <a:endParaRPr lang="en-US" sz="1350" dirty="0"/>
           </a:p>
@@ -12122,7 +12164,7 @@
                   <a:srgbClr val="14342B"/>
                 </a:solidFill>
               </a:rPr>
-              <a:t>Ladefenster wird als aktiv markiert</a:t>
+              <a:t>Aktives Ladefenster als .active / kein .active wenn kein Ladevorgang</a:t>
             </a:r>
             <a:endParaRPr lang="en-US" sz="1050" dirty="0"/>
           </a:p>
@@ -12158,7 +12200,7 @@
                   <a:srgbClr val="587067"/>
                 </a:solidFill>
               </a:rPr>
-              <a:t>Nutzer erkennt wann das Fahrzeug gerade geladen wird</a:t>
+              <a:t>Falsche Markierung täuscht über Ladestatus – Nutzer lädt teuer ohne es zu merken</a:t>
             </a:r>
             <a:endParaRPr lang="en-US" sz="1000" dirty="0"/>
           </a:p>
@@ -12228,7 +12270,7 @@
                   <a:srgbClr val="14342B"/>
                 </a:solidFill>
               </a:rPr>
-              <a:t>Teure Fenster erhalten Warnung-Klasse</a:t>
+              <a:t>Teure Fenster .warning / kein .warning bei günstigen Preisen</a:t>
             </a:r>
             <a:endParaRPr lang="en-US" sz="1050" dirty="0"/>
           </a:p>
@@ -12264,7 +12306,7 @@
                   <a:srgbClr val="587067"/>
                 </a:solidFill>
               </a:rPr>
-              <a:t>Nutzer sieht sofort: jetzt ist Laden teuer – visuelle Warnung muss korrekt sein</a:t>
+              <a:t>Beide Richtungen werden getestet: Warnung erscheint genau dann wenn nötig</a:t>
             </a:r>
             <a:endParaRPr lang="en-US" sz="1000" dirty="0"/>
           </a:p>
@@ -12334,7 +12376,7 @@
                   <a:srgbClr val="14342B"/>
                 </a:solidFill>
               </a:rPr>
-              <a:t>DateNavigator.vue  –  3 Fälle</a:t>
+              <a:t>DateNavigator.vue  –  4 Fälle</a:t>
             </a:r>
             <a:endParaRPr lang="en-US" sz="1350" dirty="0"/>
           </a:p>
@@ -12510,7 +12552,7 @@
                   <a:srgbClr val="14342B"/>
                 </a:solidFill>
               </a:rPr>
-              <a:t>Weiter-Button deaktiviert am heutigen Tag</a:t>
+              <a:t>Weiter-Button deaktiviert heute / aktiv wenn Spielraum vorhanden</a:t>
             </a:r>
             <a:endParaRPr lang="en-US" sz="1050" dirty="0"/>
           </a:p>
@@ -12546,7 +12588,7 @@
                   <a:srgbClr val="587067"/>
                 </a:solidFill>
               </a:rPr>
-              <a:t>Keine Zukunftsdaten vorhanden – Navigation würde leere Tabelle zeigen</a:t>
+              <a:t>Fehlende Prüfung des aktiven Zustands wäre Blind Spot</a:t>
             </a:r>
             <a:endParaRPr lang="en-US" sz="1000" dirty="0"/>
           </a:p>
@@ -12616,7 +12658,7 @@
                   <a:srgbClr val="14342B"/>
                 </a:solidFill>
               </a:rPr>
-              <a:t>Tageswahl löst update-date Event aus</a:t>
+              <a:t>Vorwärts- und Rückwärts-Klick emittieren update-date Event</a:t>
             </a:r>
             <a:endParaRPr lang="en-US" sz="1050" dirty="0"/>
           </a:p>
@@ -12652,7 +12694,7 @@
                   <a:srgbClr val="587067"/>
                 </a:solidFill>
               </a:rPr>
-              <a:t>Kernfunktion: ohne dieses Event werden keine neuen Sessions nachgeladen</a:t>
+              <a:t>Beide Richtungen getestet – Kernfunktion: ohne Event keine neuen Sessions</a:t>
             </a:r>
             <a:endParaRPr lang="en-US" sz="1000" dirty="0"/>
           </a:p>
@@ -12722,7 +12764,7 @@
                   <a:srgbClr val="14342B"/>
                 </a:solidFill>
               </a:rPr>
-              <a:t>SessionTable.vue  –  2 Fälle</a:t>
+              <a:t>SessionTable.vue  –  4 Fälle</a:t>
             </a:r>
             <a:endParaRPr lang="en-US" sz="1350" dirty="0"/>
           </a:p>
@@ -12898,7 +12940,7 @@
                   <a:srgbClr val="14342B"/>
                 </a:solidFill>
               </a:rPr>
-              <a:t>Je Ladevorgang genau eine Zeile</a:t>
+              <a:t>Korrekte Zeilenanzahl, Reihenfolge wie Eingabe; Fahrzeugname und Ladepunkt je Zeile</a:t>
             </a:r>
             <a:endParaRPr lang="en-US" sz="1050" dirty="0"/>
           </a:p>
@@ -12934,7 +12976,7 @@
                   <a:srgbClr val="587067"/>
                 </a:solidFill>
               </a:rPr>
-              <a:t>Jede Session muss erscheinen – fehlende oder doppelte Zeilen wären Fehler</a:t>
+              <a:t>Jede Session muss mit vollständigen Abrechnungsdaten erscheinen</a:t>
             </a:r>
             <a:endParaRPr lang="en-US" sz="1000" dirty="0"/>
           </a:p>

--- a/WAT4/kalt/PRESENTATION.pptx
+++ b/WAT4/kalt/PRESENTATION.pptx
@@ -2364,7 +2364,7 @@
                   <a:srgbClr val="14342B"/>
                 </a:solidFill>
               </a:rPr>
-              <a:t>Kaltenegger – 4 Fälle / 2 Flows</a:t>
+              <a:t>Kaltenegger – 6 Fälle / 2 Flows</a:t>
             </a:r>
             <a:endParaRPr lang="en-US" sz="1300" dirty="0"/>
           </a:p>
@@ -3287,7 +3287,7 @@
                   <a:srgbClr val="14342B"/>
                 </a:solidFill>
               </a:rPr>
-              <a:t>charge-plan-flow  –  2 Testfälle</a:t>
+              <a:t>charge-plan-flow  –  4 Testfälle</a:t>
             </a:r>
             <a:endParaRPr lang="en-US" sz="1400" dirty="0"/>
           </a:p>
